--- a/media/exports/reports/2026-10/growth-trades.pptx
+++ b/media/exports/reports/2026-10/growth-trades.pptx
@@ -246,76 +246,76 @@
                 <c:formatCode>$#,##0;[Red]($#,##0);"-"</c:formatCode>
                 <c:ptCount val="24"/>
                 <c:pt idx="0">
-                  <c:v>179474</c:v>
+                  <c:v>200124</c:v>
                 </c:pt>
                 <c:pt idx="1">
-                  <c:v>143156</c:v>
+                  <c:v>159406</c:v>
                 </c:pt>
                 <c:pt idx="2">
-                  <c:v>140909</c:v>
+                  <c:v>156794</c:v>
                 </c:pt>
                 <c:pt idx="3">
-                  <c:v>160943</c:v>
+                  <c:v>179190</c:v>
                 </c:pt>
                 <c:pt idx="4">
-                  <c:v>135082</c:v>
+                  <c:v>150465</c:v>
                 </c:pt>
                 <c:pt idx="5">
-                  <c:v>124705</c:v>
+                  <c:v>138865</c:v>
                 </c:pt>
                 <c:pt idx="6">
-                  <c:v>129816</c:v>
+                  <c:v>144649</c:v>
                 </c:pt>
                 <c:pt idx="7">
-                  <c:v>164113</c:v>
+                  <c:v>183265</c:v>
                 </c:pt>
                 <c:pt idx="8">
-                  <c:v>186760</c:v>
+                  <c:v>208588</c:v>
                 </c:pt>
                 <c:pt idx="9">
-                  <c:v>139164</c:v>
+                  <c:v>155118</c:v>
                 </c:pt>
                 <c:pt idx="10">
-                  <c:v>128255</c:v>
+                  <c:v>143077</c:v>
                 </c:pt>
                 <c:pt idx="11">
-                  <c:v>128898</c:v>
+                  <c:v>143566</c:v>
                 </c:pt>
                 <c:pt idx="12">
-                  <c:v>174786</c:v>
+                  <c:v>194966</c:v>
                 </c:pt>
                 <c:pt idx="13">
-                  <c:v>135079</c:v>
+                  <c:v>150283</c:v>
                 </c:pt>
                 <c:pt idx="14">
-                  <c:v>164780</c:v>
+                  <c:v>183306</c:v>
                 </c:pt>
                 <c:pt idx="15">
-                  <c:v>196372</c:v>
+                  <c:v>218908</c:v>
                 </c:pt>
                 <c:pt idx="16">
-                  <c:v>191500</c:v>
+                  <c:v>213578</c:v>
                 </c:pt>
                 <c:pt idx="17">
-                  <c:v>164987</c:v>
+                  <c:v>183967</c:v>
                 </c:pt>
                 <c:pt idx="18">
-                  <c:v>161963</c:v>
+                  <c:v>180342</c:v>
                 </c:pt>
                 <c:pt idx="19">
-                  <c:v>173163</c:v>
+                  <c:v>193032</c:v>
                 </c:pt>
                 <c:pt idx="20">
-                  <c:v>193245</c:v>
+                  <c:v>215610</c:v>
                 </c:pt>
                 <c:pt idx="21">
-                  <c:v>179007</c:v>
+                  <c:v>199523</c:v>
                 </c:pt>
                 <c:pt idx="22">
-                  <c:v>202337</c:v>
+                  <c:v>225460</c:v>
                 </c:pt>
                 <c:pt idx="23">
-                  <c:v>76875</c:v>
+                  <c:v>86031</c:v>
                 </c:pt>
               </c:numCache>
             </c:numRef>
@@ -558,76 +558,76 @@
                 <c:formatCode>$#,##0;[Red]($#,##0);"-"</c:formatCode>
                 <c:ptCount val="24"/>
                 <c:pt idx="0">
-                  <c:v>24670</c:v>
+                  <c:v>27650</c:v>
                 </c:pt>
                 <c:pt idx="1">
-                  <c:v>24670</c:v>
+                  <c:v>27650</c:v>
                 </c:pt>
                 <c:pt idx="2">
-                  <c:v>24670</c:v>
+                  <c:v>27650</c:v>
                 </c:pt>
                 <c:pt idx="3">
-                  <c:v>27930</c:v>
+                  <c:v>31300</c:v>
                 </c:pt>
                 <c:pt idx="4">
-                  <c:v>27930</c:v>
+                  <c:v>31300</c:v>
                 </c:pt>
                 <c:pt idx="5">
-                  <c:v>27930</c:v>
+                  <c:v>31300</c:v>
                 </c:pt>
                 <c:pt idx="6">
-                  <c:v>27930</c:v>
+                  <c:v>31300</c:v>
                 </c:pt>
                 <c:pt idx="7">
-                  <c:v>31870</c:v>
+                  <c:v>35720</c:v>
                 </c:pt>
                 <c:pt idx="8">
-                  <c:v>33200</c:v>
+                  <c:v>37200</c:v>
                 </c:pt>
                 <c:pt idx="9">
-                  <c:v>33200</c:v>
+                  <c:v>37200</c:v>
                 </c:pt>
                 <c:pt idx="10">
-                  <c:v>33200</c:v>
+                  <c:v>37200</c:v>
                 </c:pt>
                 <c:pt idx="11">
-                  <c:v>35800</c:v>
+                  <c:v>40100</c:v>
                 </c:pt>
                 <c:pt idx="12">
-                  <c:v>35800</c:v>
+                  <c:v>40100</c:v>
                 </c:pt>
                 <c:pt idx="13">
-                  <c:v>35800</c:v>
+                  <c:v>40100</c:v>
                 </c:pt>
                 <c:pt idx="14">
-                  <c:v>35800</c:v>
+                  <c:v>40100</c:v>
                 </c:pt>
                 <c:pt idx="15">
-                  <c:v>37500</c:v>
+                  <c:v>42000</c:v>
                 </c:pt>
                 <c:pt idx="16">
-                  <c:v>37500</c:v>
+                  <c:v>42000</c:v>
                 </c:pt>
                 <c:pt idx="17">
-                  <c:v>37500</c:v>
+                  <c:v>42000</c:v>
                 </c:pt>
                 <c:pt idx="18">
-                  <c:v>40500</c:v>
+                  <c:v>45350</c:v>
                 </c:pt>
                 <c:pt idx="19">
-                  <c:v>40500</c:v>
+                  <c:v>45350</c:v>
                 </c:pt>
                 <c:pt idx="20">
-                  <c:v>40500</c:v>
+                  <c:v>45350</c:v>
                 </c:pt>
                 <c:pt idx="21">
-                  <c:v>40500</c:v>
+                  <c:v>45350</c:v>
                 </c:pt>
                 <c:pt idx="22">
-                  <c:v>40500</c:v>
+                  <c:v>45350</c:v>
                 </c:pt>
                 <c:pt idx="23">
-                  <c:v>40500</c:v>
+                  <c:v>45350</c:v>
                 </c:pt>
               </c:numCache>
             </c:numRef>
@@ -870,76 +870,76 @@
                 <c:formatCode>$#,##0;[Red]($#,##0);"-"</c:formatCode>
                 <c:ptCount val="24"/>
                 <c:pt idx="0">
-                  <c:v>131400</c:v>
+                  <c:v>147100</c:v>
                 </c:pt>
                 <c:pt idx="1">
-                  <c:v>92600</c:v>
+                  <c:v>103700</c:v>
                 </c:pt>
                 <c:pt idx="2">
-                  <c:v>89400</c:v>
+                  <c:v>100100</c:v>
                 </c:pt>
                 <c:pt idx="3">
-                  <c:v>106000</c:v>
+                  <c:v>118600</c:v>
                 </c:pt>
                 <c:pt idx="4">
-                  <c:v>86100</c:v>
+                  <c:v>96400</c:v>
                 </c:pt>
                 <c:pt idx="5">
-                  <c:v>74900</c:v>
+                  <c:v>83900</c:v>
                 </c:pt>
                 <c:pt idx="6">
-                  <c:v>80300</c:v>
+                  <c:v>89900</c:v>
                 </c:pt>
                 <c:pt idx="7">
-                  <c:v>112700</c:v>
+                  <c:v>126300</c:v>
                 </c:pt>
                 <c:pt idx="8">
-                  <c:v>135800</c:v>
+                  <c:v>152100</c:v>
                 </c:pt>
                 <c:pt idx="9">
-                  <c:v>86200</c:v>
+                  <c:v>96500</c:v>
                 </c:pt>
                 <c:pt idx="10">
-                  <c:v>75100</c:v>
+                  <c:v>84200</c:v>
                 </c:pt>
                 <c:pt idx="11">
-                  <c:v>70800</c:v>
+                  <c:v>79300</c:v>
                 </c:pt>
                 <c:pt idx="12">
-                  <c:v>113300</c:v>
+                  <c:v>126900</c:v>
                 </c:pt>
                 <c:pt idx="13">
-                  <c:v>69700</c:v>
+                  <c:v>78100</c:v>
                 </c:pt>
                 <c:pt idx="14">
-                  <c:v>97500</c:v>
+                  <c:v>109100</c:v>
                 </c:pt>
                 <c:pt idx="15">
-                  <c:v>129300</c:v>
+                  <c:v>144800</c:v>
                 </c:pt>
                 <c:pt idx="16">
-                  <c:v>129400</c:v>
+                  <c:v>144900</c:v>
                 </c:pt>
                 <c:pt idx="17">
-                  <c:v>104400</c:v>
+                  <c:v>116900</c:v>
                 </c:pt>
                 <c:pt idx="18">
-                  <c:v>92400</c:v>
+                  <c:v>103400</c:v>
                 </c:pt>
                 <c:pt idx="19">
-                  <c:v>103200</c:v>
+                  <c:v>115600</c:v>
                 </c:pt>
                 <c:pt idx="20">
-                  <c:v>127600</c:v>
+                  <c:v>143000</c:v>
                 </c:pt>
                 <c:pt idx="21">
-                  <c:v>109600</c:v>
+                  <c:v>122800</c:v>
                 </c:pt>
                 <c:pt idx="22">
-                  <c:v>130700</c:v>
+                  <c:v>146300</c:v>
                 </c:pt>
                 <c:pt idx="23">
-                  <c:v>33000</c:v>
+                  <c:v>37000</c:v>
                 </c:pt>
               </c:numCache>
             </c:numRef>
@@ -988,7 +988,7 @@
         <c:axId val="-2100718248"/>
         <c:scaling>
           <c:orientation val="minMax"/>
-          <c:max val="150000.0"/>
+          <c:max val="200000.0"/>
           <c:min val="0.0"/>
         </c:scaling>
         <c:delete val="0"/>
@@ -1182,76 +1182,76 @@
                 <c:formatCode>$#,##0;[Red]($#,##0);"-"</c:formatCode>
                 <c:ptCount val="24"/>
                 <c:pt idx="0">
-                  <c:v>23404</c:v>
+                  <c:v>25374</c:v>
                 </c:pt>
                 <c:pt idx="1">
-                  <c:v>25886</c:v>
+                  <c:v>28056</c:v>
                 </c:pt>
                 <c:pt idx="2">
-                  <c:v>26839</c:v>
+                  <c:v>29044</c:v>
                 </c:pt>
                 <c:pt idx="3">
-                  <c:v>27013</c:v>
+                  <c:v>29290</c:v>
                 </c:pt>
                 <c:pt idx="4">
-                  <c:v>21052</c:v>
+                  <c:v>22765</c:v>
                 </c:pt>
                 <c:pt idx="5">
-                  <c:v>21875</c:v>
+                  <c:v>23665</c:v>
                 </c:pt>
                 <c:pt idx="6">
-                  <c:v>21586</c:v>
+                  <c:v>23449</c:v>
                 </c:pt>
                 <c:pt idx="7">
-                  <c:v>19543</c:v>
+                  <c:v>21245</c:v>
                 </c:pt>
                 <c:pt idx="8">
-                  <c:v>17760</c:v>
+                  <c:v>19288</c:v>
                 </c:pt>
                 <c:pt idx="9">
-                  <c:v>19764</c:v>
+                  <c:v>21418</c:v>
                 </c:pt>
                 <c:pt idx="10">
-                  <c:v>19955</c:v>
+                  <c:v>21677</c:v>
                 </c:pt>
                 <c:pt idx="11">
-                  <c:v>22298</c:v>
+                  <c:v>24166</c:v>
                 </c:pt>
                 <c:pt idx="12">
-                  <c:v>25686</c:v>
+                  <c:v>27966</c:v>
                 </c:pt>
                 <c:pt idx="13">
-                  <c:v>29579</c:v>
+                  <c:v>32083</c:v>
                 </c:pt>
                 <c:pt idx="14">
-                  <c:v>31480</c:v>
+                  <c:v>34106</c:v>
                 </c:pt>
                 <c:pt idx="15">
-                  <c:v>29572</c:v>
+                  <c:v>32108</c:v>
                 </c:pt>
                 <c:pt idx="16">
-                  <c:v>24600</c:v>
+                  <c:v>26678</c:v>
                 </c:pt>
                 <c:pt idx="17">
-                  <c:v>23087</c:v>
+                  <c:v>25067</c:v>
                 </c:pt>
                 <c:pt idx="18">
-                  <c:v>29063</c:v>
+                  <c:v>31592</c:v>
                 </c:pt>
                 <c:pt idx="19">
-                  <c:v>29463</c:v>
+                  <c:v>32082</c:v>
                 </c:pt>
                 <c:pt idx="20">
-                  <c:v>25145</c:v>
+                  <c:v>27260</c:v>
                 </c:pt>
                 <c:pt idx="21">
-                  <c:v>28907</c:v>
+                  <c:v>31373</c:v>
                 </c:pt>
                 <c:pt idx="22">
-                  <c:v>31137</c:v>
+                  <c:v>33810</c:v>
                 </c:pt>
                 <c:pt idx="23">
-                  <c:v>3375</c:v>
+                  <c:v>3681</c:v>
                 </c:pt>
               </c:numCache>
             </c:numRef>
@@ -1825,7 +1825,7 @@
           <a:lstStyle/>
           <a:p>
             <a:r>
-              <a:t>Trades · All. October so far against October last year: (40.4%); Year to date against the same period last year: 11.7%; Gross margin, year to date: 38.5%. Revenue is 11.7% up on the same period last year, year to date ($651,464 against $583,077). Maintenance contracts make the highest gross margin (59.5%); Installations the lowest (28.8%). The business needs 31.1% gross margin just to cover overheads. Installations: 28.8% gross margin, 6.2 points under the 35.0% target: about $24,765 on $400,900 of revenue this financial year to date. It's below the 31.1% needed to cover overheads, too. Maintenance contracts: 59.5% gross margin, 24.5 points over the 35.0% target ($39,764 ahead on $162,000 this financial year to date).</a:t>
+              <a:t>Trades · All. October so far against October last year: (40.1%); Year to date against the same period last year: 11.7%; Gross margin, year to date: 44.9%. Revenue is 11.7% up on the same period last year, year to date ($726,624 against $650,349). Maintenance contracts make the highest gross margin (63.9%); Installations the lowest (36.5%). The business needs 39.0% gross margin just to cover overheads. Installations: 36.5% gross margin, 1.5 points over the 35.0% target ($6,565 ahead on $449,100 this financial year to date). Maintenance contracts: 63.9% gross margin, 28.9 points over the 35.0% target ($52,374 ahead on $181,400 this financial year to date).</a:t>
             </a:r>
           </a:p>
         </p:txBody>
@@ -1895,7 +1895,7 @@
           <a:lstStyle/>
           <a:p>
             <a:r>
-              <a:t>Trades · Maintenance contracts. October so far against October last year: 13.1%; Year to date against the same period last year: 19.6%; Gross margin, year to date: 59.5%. Maintenance contracts brought in $162,000 this financial year to date, 19.6% on the same period last year (faster than the business as a whole, 11.7%), at a 59.5% gross margin (above the 38.5% overall). Maintenance contracts: 59.5% gross margin, 24.5 points over the 35.0% target ($39,764 ahead on $162,000 this financial year to date).</a:t>
+              <a:t>Trades · Maintenance contracts. October so far against October last year: 13.1%; Year to date against the same period last year: 19.6%; Gross margin, year to date: 63.9%. Maintenance contracts brought in $181,400 this financial year to date, 19.6% on the same period last year (faster than the business as a whole, 11.7%), at a 63.9% gross margin (above the 44.9% overall). Maintenance contracts: 63.9% gross margin, 28.9 points over the 35.0% target ($52,374 ahead on $181,400 this financial year to date).</a:t>
             </a:r>
           </a:p>
         </p:txBody>
@@ -1965,7 +1965,7 @@
           <a:lstStyle/>
           <a:p>
             <a:r>
-              <a:t>Trades · Installations. October so far against October last year: (53.4%); Year to date against the same period last year: 9.0%; Gross margin, year to date: 28.8%. Installations brought in $400,900 this financial year to date, 9.0% on the same period last year (slower than the business as a whole, 11.7%), at a 28.8% gross margin (below the 38.5% overall). Installations: 28.8% gross margin, 6.2 points under the 35.0% target: about $24,765 on $400,900 of revenue this financial year to date. It's below the 31.1% needed to cover overheads, too.</a:t>
+              <a:t>Trades · Installations. October so far against October last year: (53.3%); Year to date against the same period last year: 9.0%; Gross margin, year to date: 36.5%. Installations brought in $449,100 this financial year to date, 9.0% on the same period last year (slower than the business as a whole, 11.7%), at a 36.5% gross margin (below the 44.9% overall). Installations: 36.5% gross margin, 1.5 points over the 35.0% target ($6,565 ahead on $449,100 this financial year to date).</a:t>
             </a:r>
           </a:p>
         </p:txBody>
@@ -2035,7 +2035,7 @@
           <a:lstStyle/>
           <a:p>
             <a:r>
-              <a:t>Trades · Call-outs and repairs. October so far against October last year: (84.9%); Year to date against the same period last year: 11.0%; Gross margin, year to date: 43.7%. Call-outs and repairs brought in $88,564 this financial year to date, 11.0% on the same period last year (slower than the business as a whole, 11.7%), at a 43.7% gross margin (above the 38.5% overall). Call-outs and repairs: 43.7% gross margin, 8.7 points over the 35.0% target ($7,747 ahead on $88,564 this financial year to date).</a:t>
+              <a:t>Trades · Call-outs and repairs. October so far against October last year: (84.8%); Year to date against the same period last year: 11.1%; Gross margin, year to date: 48.2%. Call-outs and repairs brought in $96,124 this financial year to date, 11.1% on the same period last year (slower than the business as a whole, 11.7%), at a 48.2% gross margin (above the 44.9% overall). Call-outs and repairs: 48.2% gross margin, 13.2 points over the 35.0% target ($12,661 ahead on $96,124 this financial year to date).</a:t>
             </a:r>
           </a:p>
         </p:txBody>
@@ -2105,7 +2105,7 @@
           <a:lstStyle/>
           <a:p>
             <a:r>
-              <a:t>By line: financial year to date (Jul to Oct 2026) against the same period last year · Trades. From gross margin to profit · latest closed month: September: October is still in progress and wages are paid fortnightly, so a part month can't be bridged: this is September, the latest closed month. September's jobs made $73,107 gross margin (36.1%). Technician time not charged to jobs took $3,430 and overheads $59,580, leaving $10,097 profit before tax (5.0% of revenue). To cover overheads, jobs need a 31.1% gross margin on average.</a:t>
+              <a:t>By line: financial year to date (Jul to Oct 2026) against the same period last year · Trades. From gross margin to profit · latest closed month: September: October is still in progress and wages are paid fortnightly, so a part month can't be bridged: this is September, the latest closed month. September's jobs made $96,230 gross margin (42.7%). Technician time not charged to jobs took $28,417 and overheads $59,580, leaving $8,233 profit before tax (3.7% of revenue). To cover overheads, jobs need a 39.0% gross margin on average.</a:t>
             </a:r>
           </a:p>
         </p:txBody>
@@ -5504,7 +5504,7 @@
                 </a:solidFill>
                 <a:latin typeface="Roboto"/>
               </a:rPr>
-              <a:t>Data retrieved 2pm, Tue 6 Oct 2026 · Generated 8 Oct 2026, 9:35am · Sample data · Made with Python (python-pptx)</a:t>
+              <a:t>Data retrieved 2pm, Tue 6 Oct 2026 · Generated 9 Oct 2026, 8:41am · Sample data · Made with Python (python-pptx)</a:t>
             </a:r>
           </a:p>
         </p:txBody>
@@ -5850,7 +5850,7 @@
                 </a:solidFill>
                 <a:latin typeface="Roboto"/>
               </a:rPr>
-              <a:t>(40.4%)</a:t>
+              <a:t>(40.1%)</a:t>
             </a:r>
           </a:p>
         </p:txBody>
@@ -5889,7 +5889,7 @@
                 </a:solidFill>
                 <a:latin typeface="Roboto"/>
               </a:rPr>
-              <a:t>$76,875 against $128,898</a:t>
+              <a:t>$86,031 against $143,566</a:t>
             </a:r>
           </a:p>
         </p:txBody>
@@ -6055,7 +6055,7 @@
                 </a:solidFill>
                 <a:latin typeface="Roboto"/>
               </a:rPr>
-              <a:t>$651,464 against $583,077</a:t>
+              <a:t>$726,624 against $650,349</a:t>
             </a:r>
           </a:p>
         </p:txBody>
@@ -6182,7 +6182,7 @@
                 </a:solidFill>
                 <a:latin typeface="Roboto"/>
               </a:rPr>
-              <a:t>38.5%</a:t>
+              <a:t>44.9%</a:t>
             </a:r>
           </a:p>
         </p:txBody>
@@ -6221,7 +6221,7 @@
                 </a:solidFill>
                 <a:latin typeface="Roboto"/>
               </a:rPr>
-              <a:t>$250,758 before overheads</a:t>
+              <a:t>$325,918 before overheads</a:t>
             </a:r>
           </a:p>
         </p:txBody>
@@ -6236,7 +6236,7 @@
         </p:nvGraphicFramePr>
         <p:xfrm>
           <a:off x="457200" y="2604516"/>
-          <a:ext cx="11277295" cy="2119884"/>
+          <a:ext cx="11277295" cy="2318004"/>
         </p:xfrm>
         <a:graphic>
           <a:graphicData uri="http://schemas.openxmlformats.org/drawingml/2006/chart">
@@ -6252,8 +6252,8 @@
         </p:nvSpPr>
         <p:spPr>
           <a:xfrm>
-            <a:off x="457200" y="4815840"/>
-            <a:ext cx="5501487" cy="1493520"/>
+            <a:off x="457200" y="5013960"/>
+            <a:ext cx="5501487" cy="1295400"/>
           </a:xfrm>
           <a:prstGeom prst="rect">
             <a:avLst/>
@@ -6301,7 +6301,7 @@
         </p:nvSpPr>
         <p:spPr>
           <a:xfrm>
-            <a:off x="594360" y="4870704"/>
+            <a:off x="594360" y="5068824"/>
             <a:ext cx="5227167" cy="274320"/>
           </a:xfrm>
           <a:prstGeom prst="rect">
@@ -6340,8 +6340,8 @@
         </p:nvSpPr>
         <p:spPr>
           <a:xfrm>
-            <a:off x="594360" y="5145024"/>
-            <a:ext cx="5227167" cy="1127760"/>
+            <a:off x="594360" y="5343144"/>
+            <a:ext cx="5227167" cy="929640"/>
           </a:xfrm>
           <a:prstGeom prst="rect">
             <a:avLst/>
@@ -6366,7 +6366,7 @@
                 </a:solidFill>
                 <a:latin typeface="Roboto"/>
               </a:rPr>
-              <a:t>Revenue is 11.7% up on the same period last year, year to date ($651,464 against $583,077). Maintenance contracts make the highest gross margin (59.5%); Installations the lowest (28.8%). The business needs 31.1% gross margin just to cover overheads.</a:t>
+              <a:t>Revenue is 11.7% up on the same period last year, year to date ($726,624 against $650,349). Maintenance contracts make the highest gross margin (63.9%); Installations the lowest (36.5%). The business needs 39.0% gross margin just to cover overheads.</a:t>
             </a:r>
           </a:p>
         </p:txBody>
@@ -6379,8 +6379,8 @@
         </p:nvSpPr>
         <p:spPr>
           <a:xfrm>
-            <a:off x="6233007" y="4815840"/>
-            <a:ext cx="5501487" cy="1493520"/>
+            <a:off x="6233007" y="5013960"/>
+            <a:ext cx="5501487" cy="1295400"/>
           </a:xfrm>
           <a:prstGeom prst="rect">
             <a:avLst/>
@@ -6428,7 +6428,7 @@
         </p:nvSpPr>
         <p:spPr>
           <a:xfrm>
-            <a:off x="6370167" y="4870704"/>
+            <a:off x="6370167" y="5068824"/>
             <a:ext cx="5227167" cy="274320"/>
           </a:xfrm>
           <a:prstGeom prst="rect">
@@ -6467,8 +6467,8 @@
         </p:nvSpPr>
         <p:spPr>
           <a:xfrm>
-            <a:off x="6370167" y="5145024"/>
-            <a:ext cx="5227167" cy="1127760"/>
+            <a:off x="6370167" y="5343144"/>
+            <a:ext cx="5227167" cy="929640"/>
           </a:xfrm>
           <a:prstGeom prst="rect">
             <a:avLst/>
@@ -6493,7 +6493,7 @@
                 </a:solidFill>
                 <a:latin typeface="Roboto"/>
               </a:rPr>
-              <a:t>Installations: 28.8% gross margin, 6.2 points under the 35.0% target: about $24,765 on $400,900 of revenue this financial year to date. It's below the 31.1% needed to cover overheads, too. Maintenance contracts: 59.5% gross margin, 24.5 points over the 35.0% target ($39,764 ahead on $162,000 this financial year to date).</a:t>
+              <a:t>Installations: 36.5% gross margin, 1.5 points over the 35.0% target ($6,565 ahead on $449,100 this financial year to date). Maintenance contracts: 63.9% gross margin, 28.9 points over the 35.0% target ($52,374 ahead on $181,400 this financial year to date).</a:t>
             </a:r>
           </a:p>
         </p:txBody>
@@ -6571,7 +6571,7 @@
                 </a:solidFill>
                 <a:latin typeface="Roboto"/>
               </a:rPr>
-              <a:t>Data retrieved 2pm, Tue 6 Oct 2026 · Generated 8 Oct 2026, 9:35am · Sample data · Made with Python (python-pptx)</a:t>
+              <a:t>Data retrieved 2pm, Tue 6 Oct 2026 · Generated 9 Oct 2026, 8:41am · Sample data · Made with Python (python-pptx)</a:t>
             </a:r>
           </a:p>
         </p:txBody>
@@ -6956,7 +6956,7 @@
                 </a:solidFill>
                 <a:latin typeface="Roboto"/>
               </a:rPr>
-              <a:t>$40,500 against $35,800</a:t>
+              <a:t>$45,350 against $40,100</a:t>
             </a:r>
           </a:p>
         </p:txBody>
@@ -7122,7 +7122,7 @@
                 </a:solidFill>
                 <a:latin typeface="Roboto"/>
               </a:rPr>
-              <a:t>$162,000 against $135,400</a:t>
+              <a:t>$181,400 against $151,700</a:t>
             </a:r>
           </a:p>
         </p:txBody>
@@ -7249,7 +7249,7 @@
                 </a:solidFill>
                 <a:latin typeface="Roboto"/>
               </a:rPr>
-              <a:t>59.5%</a:t>
+              <a:t>63.9%</a:t>
             </a:r>
           </a:p>
         </p:txBody>
@@ -7288,7 +7288,7 @@
                 </a:solidFill>
                 <a:latin typeface="Roboto"/>
               </a:rPr>
-              <a:t>$96,464 before overheads</a:t>
+              <a:t>$115,864 before overheads</a:t>
             </a:r>
           </a:p>
         </p:txBody>
@@ -7433,7 +7433,7 @@
                 </a:solidFill>
                 <a:latin typeface="Roboto"/>
               </a:rPr>
-              <a:t>Maintenance contracts brought in $162,000 this financial year to date, 19.6% on the same period last year (faster than the business as a whole, 11.7%), at a 59.5% gross margin (above the 38.5% overall).</a:t>
+              <a:t>Maintenance contracts brought in $181,400 this financial year to date, 19.6% on the same period last year (faster than the business as a whole, 11.7%), at a 63.9% gross margin (above the 44.9% overall).</a:t>
             </a:r>
           </a:p>
         </p:txBody>
@@ -7560,7 +7560,7 @@
                 </a:solidFill>
                 <a:latin typeface="Roboto"/>
               </a:rPr>
-              <a:t>Maintenance contracts: 59.5% gross margin, 24.5 points over the 35.0% target ($39,764 ahead on $162,000 this financial year to date).</a:t>
+              <a:t>Maintenance contracts: 63.9% gross margin, 28.9 points over the 35.0% target ($52,374 ahead on $181,400 this financial year to date).</a:t>
             </a:r>
           </a:p>
         </p:txBody>
@@ -7638,7 +7638,7 @@
                 </a:solidFill>
                 <a:latin typeface="Roboto"/>
               </a:rPr>
-              <a:t>Data retrieved 2pm, Tue 6 Oct 2026 · Generated 8 Oct 2026, 9:35am · Sample data · Made with Python (python-pptx)</a:t>
+              <a:t>Data retrieved 2pm, Tue 6 Oct 2026 · Generated 9 Oct 2026, 8:41am · Sample data · Made with Python (python-pptx)</a:t>
             </a:r>
           </a:p>
         </p:txBody>
@@ -7984,7 +7984,7 @@
                 </a:solidFill>
                 <a:latin typeface="Roboto"/>
               </a:rPr>
-              <a:t>(53.4%)</a:t>
+              <a:t>(53.3%)</a:t>
             </a:r>
           </a:p>
         </p:txBody>
@@ -8023,7 +8023,7 @@
                 </a:solidFill>
                 <a:latin typeface="Roboto"/>
               </a:rPr>
-              <a:t>$33,000 against $70,800</a:t>
+              <a:t>$37,000 against $79,300</a:t>
             </a:r>
           </a:p>
         </p:txBody>
@@ -8189,7 +8189,7 @@
                 </a:solidFill>
                 <a:latin typeface="Roboto"/>
               </a:rPr>
-              <a:t>$400,900 against $367,900</a:t>
+              <a:t>$449,100 against $412,100</a:t>
             </a:r>
           </a:p>
         </p:txBody>
@@ -8316,7 +8316,7 @@
                 </a:solidFill>
                 <a:latin typeface="Roboto"/>
               </a:rPr>
-              <a:t>28.8%</a:t>
+              <a:t>36.5%</a:t>
             </a:r>
           </a:p>
         </p:txBody>
@@ -8355,7 +8355,7 @@
                 </a:solidFill>
                 <a:latin typeface="Roboto"/>
               </a:rPr>
-              <a:t>$115,550 before overheads</a:t>
+              <a:t>$163,750 before overheads</a:t>
             </a:r>
           </a:p>
         </p:txBody>
@@ -8500,7 +8500,7 @@
                 </a:solidFill>
                 <a:latin typeface="Roboto"/>
               </a:rPr>
-              <a:t>Installations brought in $400,900 this financial year to date, 9.0% on the same period last year (slower than the business as a whole, 11.7%), at a 28.8% gross margin (below the 38.5% overall).</a:t>
+              <a:t>Installations brought in $449,100 this financial year to date, 9.0% on the same period last year (slower than the business as a whole, 11.7%), at a 36.5% gross margin (below the 44.9% overall).</a:t>
             </a:r>
           </a:p>
         </p:txBody>
@@ -8627,7 +8627,7 @@
                 </a:solidFill>
                 <a:latin typeface="Roboto"/>
               </a:rPr>
-              <a:t>Installations: 28.8% gross margin, 6.2 points under the 35.0% target: about $24,765 on $400,900 of revenue this financial year to date. It's below the 31.1% needed to cover overheads, too.</a:t>
+              <a:t>Installations: 36.5% gross margin, 1.5 points over the 35.0% target ($6,565 ahead on $449,100 this financial year to date).</a:t>
             </a:r>
           </a:p>
         </p:txBody>
@@ -8705,7 +8705,7 @@
                 </a:solidFill>
                 <a:latin typeface="Roboto"/>
               </a:rPr>
-              <a:t>Data retrieved 2pm, Tue 6 Oct 2026 · Generated 8 Oct 2026, 9:35am · Sample data · Made with Python (python-pptx)</a:t>
+              <a:t>Data retrieved 2pm, Tue 6 Oct 2026 · Generated 9 Oct 2026, 8:41am · Sample data · Made with Python (python-pptx)</a:t>
             </a:r>
           </a:p>
         </p:txBody>
@@ -9051,7 +9051,7 @@
                 </a:solidFill>
                 <a:latin typeface="Roboto"/>
               </a:rPr>
-              <a:t>(84.9%)</a:t>
+              <a:t>(84.8%)</a:t>
             </a:r>
           </a:p>
         </p:txBody>
@@ -9090,7 +9090,7 @@
                 </a:solidFill>
                 <a:latin typeface="Roboto"/>
               </a:rPr>
-              <a:t>$3,375 against $22,298</a:t>
+              <a:t>$3,681 against $24,166</a:t>
             </a:r>
           </a:p>
         </p:txBody>
@@ -9217,7 +9217,7 @@
                 </a:solidFill>
                 <a:latin typeface="Roboto"/>
               </a:rPr>
-              <a:t>11.0%</a:t>
+              <a:t>11.1%</a:t>
             </a:r>
           </a:p>
         </p:txBody>
@@ -9256,7 +9256,7 @@
                 </a:solidFill>
                 <a:latin typeface="Roboto"/>
               </a:rPr>
-              <a:t>$88,564 against $79,777</a:t>
+              <a:t>$96,124 against $86,549</a:t>
             </a:r>
           </a:p>
         </p:txBody>
@@ -9383,7 +9383,7 @@
                 </a:solidFill>
                 <a:latin typeface="Roboto"/>
               </a:rPr>
-              <a:t>43.7%</a:t>
+              <a:t>48.2%</a:t>
             </a:r>
           </a:p>
         </p:txBody>
@@ -9422,7 +9422,7 @@
                 </a:solidFill>
                 <a:latin typeface="Roboto"/>
               </a:rPr>
-              <a:t>$38,744 before overheads</a:t>
+              <a:t>$46,304 before overheads</a:t>
             </a:r>
           </a:p>
         </p:txBody>
@@ -9567,7 +9567,7 @@
                 </a:solidFill>
                 <a:latin typeface="Roboto"/>
               </a:rPr>
-              <a:t>Call-outs and repairs brought in $88,564 this financial year to date, 11.0% on the same period last year (slower than the business as a whole, 11.7%), at a 43.7% gross margin (above the 38.5% overall).</a:t>
+              <a:t>Call-outs and repairs brought in $96,124 this financial year to date, 11.1% on the same period last year (slower than the business as a whole, 11.7%), at a 48.2% gross margin (above the 44.9% overall).</a:t>
             </a:r>
           </a:p>
         </p:txBody>
@@ -9694,7 +9694,7 @@
                 </a:solidFill>
                 <a:latin typeface="Roboto"/>
               </a:rPr>
-              <a:t>Call-outs and repairs: 43.7% gross margin, 8.7 points over the 35.0% target ($7,747 ahead on $88,564 this financial year to date).</a:t>
+              <a:t>Call-outs and repairs: 48.2% gross margin, 13.2 points over the 35.0% target ($12,661 ahead on $96,124 this financial year to date).</a:t>
             </a:r>
           </a:p>
         </p:txBody>
@@ -9772,7 +9772,7 @@
                 </a:solidFill>
                 <a:latin typeface="Roboto"/>
               </a:rPr>
-              <a:t>Data retrieved 2pm, Tue 6 Oct 2026 · Generated 8 Oct 2026, 9:35am · Sample data · Made with Python (python-pptx)</a:t>
+              <a:t>Data retrieved 2pm, Tue 6 Oct 2026 · Generated 9 Oct 2026, 8:41am · Sample data · Made with Python (python-pptx)</a:t>
             </a:r>
           </a:p>
         </p:txBody>
@@ -9991,7 +9991,7 @@
                 </a:solidFill>
                 <a:latin typeface="Roboto"/>
               </a:rPr>
-              <a:t>From gross margin to profit · latest closed month: September: October is still in progress and wages are paid fortnightly, so a part month can't be bridged: this is September, the latest closed month. September's jobs made $73,107 gross margin (36.1%). Technician time not charged to jobs took $3,430 and overheads $59,580, leaving $10,097 profit before tax (5.0% of revenue). To cover overheads, jobs need a 31.1% gross margin on average.</a:t>
+              <a:t>From gross margin to profit · latest closed month: September: October is still in progress and wages are paid fortnightly, so a part month can't be bridged: this is September, the latest closed month. September's jobs made $96,230 gross margin (42.7%). Technician time not charged to jobs took $28,417 and overheads $59,580, leaving $8,233 profit before tax (3.7% of revenue). To cover overheads, jobs need a 39.0% gross margin on average.</a:t>
             </a:r>
           </a:p>
         </p:txBody>
@@ -10222,7 +10222,7 @@
                           </a:solidFill>
                           <a:latin typeface="Roboto"/>
                         </a:rPr>
-                        <a:t>$162,000</a:t>
+                        <a:t>$181,400</a:t>
                       </a:r>
                     </a:p>
                   </a:txBody>
@@ -10249,7 +10249,7 @@
                           </a:solidFill>
                           <a:latin typeface="Roboto"/>
                         </a:rPr>
-                        <a:t>$135,400</a:t>
+                        <a:t>$151,700</a:t>
                       </a:r>
                     </a:p>
                   </a:txBody>
@@ -10303,7 +10303,7 @@
                           </a:solidFill>
                           <a:latin typeface="Roboto"/>
                         </a:rPr>
-                        <a:t>$96,464</a:t>
+                        <a:t>$115,864</a:t>
                       </a:r>
                     </a:p>
                   </a:txBody>
@@ -10330,7 +10330,7 @@
                           </a:solidFill>
                           <a:latin typeface="Roboto"/>
                         </a:rPr>
-                        <a:t>59.5%</a:t>
+                        <a:t>63.9%</a:t>
                       </a:r>
                     </a:p>
                   </a:txBody>
@@ -10386,7 +10386,7 @@
                           </a:solidFill>
                           <a:latin typeface="Roboto"/>
                         </a:rPr>
-                        <a:t>$400,900</a:t>
+                        <a:t>$449,100</a:t>
                       </a:r>
                     </a:p>
                   </a:txBody>
@@ -10413,7 +10413,7 @@
                           </a:solidFill>
                           <a:latin typeface="Roboto"/>
                         </a:rPr>
-                        <a:t>$367,900</a:t>
+                        <a:t>$412,100</a:t>
                       </a:r>
                     </a:p>
                   </a:txBody>
@@ -10467,7 +10467,7 @@
                           </a:solidFill>
                           <a:latin typeface="Roboto"/>
                         </a:rPr>
-                        <a:t>$115,550</a:t>
+                        <a:t>$163,750</a:t>
                       </a:r>
                     </a:p>
                   </a:txBody>
@@ -10494,7 +10494,7 @@
                           </a:solidFill>
                           <a:latin typeface="Roboto"/>
                         </a:rPr>
-                        <a:t>28.8%</a:t>
+                        <a:t>36.5%</a:t>
                       </a:r>
                     </a:p>
                   </a:txBody>
@@ -10550,7 +10550,7 @@
                           </a:solidFill>
                           <a:latin typeface="Roboto"/>
                         </a:rPr>
-                        <a:t>$88,564</a:t>
+                        <a:t>$96,124</a:t>
                       </a:r>
                     </a:p>
                   </a:txBody>
@@ -10577,7 +10577,7 @@
                           </a:solidFill>
                           <a:latin typeface="Roboto"/>
                         </a:rPr>
-                        <a:t>$79,777</a:t>
+                        <a:t>$86,549</a:t>
                       </a:r>
                     </a:p>
                   </a:txBody>
@@ -10604,7 +10604,7 @@
                           </a:solidFill>
                           <a:latin typeface="Roboto"/>
                         </a:rPr>
-                        <a:t>11.0%</a:t>
+                        <a:t>11.1%</a:t>
                       </a:r>
                     </a:p>
                   </a:txBody>
@@ -10631,7 +10631,7 @@
                           </a:solidFill>
                           <a:latin typeface="Roboto"/>
                         </a:rPr>
-                        <a:t>$38,744</a:t>
+                        <a:t>$46,304</a:t>
                       </a:r>
                     </a:p>
                   </a:txBody>
@@ -10658,7 +10658,7 @@
                           </a:solidFill>
                           <a:latin typeface="Roboto"/>
                         </a:rPr>
-                        <a:t>43.7%</a:t>
+                        <a:t>48.2%</a:t>
                       </a:r>
                     </a:p>
                   </a:txBody>
@@ -10714,7 +10714,7 @@
                           </a:solidFill>
                           <a:latin typeface="Roboto"/>
                         </a:rPr>
-                        <a:t>$651,464</a:t>
+                        <a:t>$726,624</a:t>
                       </a:r>
                     </a:p>
                   </a:txBody>
@@ -10741,7 +10741,7 @@
                           </a:solidFill>
                           <a:latin typeface="Roboto"/>
                         </a:rPr>
-                        <a:t>$583,077</a:t>
+                        <a:t>$650,349</a:t>
                       </a:r>
                     </a:p>
                   </a:txBody>
@@ -10795,7 +10795,7 @@
                           </a:solidFill>
                           <a:latin typeface="Roboto"/>
                         </a:rPr>
-                        <a:t>$250,758</a:t>
+                        <a:t>$325,918</a:t>
                       </a:r>
                     </a:p>
                   </a:txBody>
@@ -10822,7 +10822,7 @@
                           </a:solidFill>
                           <a:latin typeface="Roboto"/>
                         </a:rPr>
-                        <a:t>38.5%</a:t>
+                        <a:t>44.9%</a:t>
                       </a:r>
                     </a:p>
                   </a:txBody>
@@ -10910,7 +10910,7 @@
                 </a:solidFill>
                 <a:latin typeface="Roboto"/>
               </a:rPr>
-              <a:t>Data retrieved 2pm, Tue 6 Oct 2026 · Generated 8 Oct 2026, 9:35am · Sample data · Made with Python (python-pptx)</a:t>
+              <a:t>Data retrieved 2pm, Tue 6 Oct 2026 · Generated 9 Oct 2026, 8:41am · Sample data · Made with Python (python-pptx)</a:t>
             </a:r>
           </a:p>
         </p:txBody>
